--- a/presentation/Olist_Presentation_EN.pptx
+++ b/presentation/Olist_Presentation_EN.pptx
@@ -372,7 +372,7 @@
             <a:pPr indent="0" algn="r">
               <a:buNone/>
             </a:pPr>
-            <a:fld id="{BB9F835B-A2FD-438B-853C-14965FDEFA4A}" type="slidenum">
+            <a:fld id="{612A1DBF-3B79-429C-B883-DCB58C3E45A9}" type="slidenum">
               <a:rPr lang="en-GB" sz="1400" b="0" u="none" strike="noStrike">
                 <a:solidFill>
                   <a:srgbClr val="000000"/>
@@ -430,7 +430,7 @@
         <p:spPr>
           <a:xfrm>
             <a:off x="685800" y="1143000"/>
-            <a:ext cx="5484960" cy="3084840"/>
+            <a:ext cx="5484600" cy="3084480"/>
           </a:xfrm>
           <a:prstGeom prst="rect">
             <a:avLst/>
@@ -453,7 +453,7 @@
         <p:spPr>
           <a:xfrm>
             <a:off x="685800" y="4400640"/>
-            <a:ext cx="5484960" cy="3598920"/>
+            <a:ext cx="5484600" cy="3598560"/>
           </a:xfrm>
           <a:prstGeom prst="rect">
             <a:avLst/>
@@ -512,7 +512,7 @@
         <p:spPr>
           <a:xfrm>
             <a:off x="3884760" y="8685360"/>
-            <a:ext cx="2970360" cy="457200"/>
+            <a:ext cx="2970000" cy="456840"/>
           </a:xfrm>
           <a:prstGeom prst="rect">
             <a:avLst/>
@@ -556,7 +556,7 @@
                 <a:tab pos="0" algn="l"/>
               </a:tabLst>
             </a:pPr>
-            <a:fld id="{C2ACB350-E54F-4360-81D1-B189E898D49F}" type="slidenum">
+            <a:fld id="{96EC3DB5-5812-41E6-8CB3-25E8E7F62383}" type="slidenum">
               <a:rPr lang="en-US" sz="1200" b="0" u="none" strike="noStrike">
                 <a:solidFill>
                   <a:schemeClr val="dk1"/>
@@ -614,7 +614,7 @@
         <p:spPr>
           <a:xfrm>
             <a:off x="685800" y="1143000"/>
-            <a:ext cx="5484960" cy="3084840"/>
+            <a:ext cx="5484600" cy="3084480"/>
           </a:xfrm>
           <a:prstGeom prst="rect">
             <a:avLst/>
@@ -637,7 +637,7 @@
         <p:spPr>
           <a:xfrm>
             <a:off x="685800" y="4400640"/>
-            <a:ext cx="5484960" cy="3598920"/>
+            <a:ext cx="5484600" cy="3598560"/>
           </a:xfrm>
           <a:prstGeom prst="rect">
             <a:avLst/>
@@ -696,7 +696,7 @@
         <p:spPr>
           <a:xfrm>
             <a:off x="3884760" y="8685360"/>
-            <a:ext cx="2970360" cy="457200"/>
+            <a:ext cx="2970000" cy="456840"/>
           </a:xfrm>
           <a:prstGeom prst="rect">
             <a:avLst/>
@@ -740,7 +740,7 @@
                 <a:tab pos="0" algn="l"/>
               </a:tabLst>
             </a:pPr>
-            <a:fld id="{210B41EE-4FFA-4736-9289-66E0623A3DE3}" type="slidenum">
+            <a:fld id="{98254969-30A7-4024-8AEE-40435149F7A9}" type="slidenum">
               <a:rPr lang="en-US" sz="1200" b="0" u="none" strike="noStrike">
                 <a:solidFill>
                   <a:schemeClr val="dk1"/>
@@ -798,7 +798,7 @@
         <p:spPr>
           <a:xfrm>
             <a:off x="685800" y="1143000"/>
-            <a:ext cx="5484960" cy="3084840"/>
+            <a:ext cx="5484600" cy="3084480"/>
           </a:xfrm>
           <a:prstGeom prst="rect">
             <a:avLst/>
@@ -821,7 +821,7 @@
         <p:spPr>
           <a:xfrm>
             <a:off x="685800" y="4400640"/>
-            <a:ext cx="5484960" cy="3598920"/>
+            <a:ext cx="5484600" cy="3598560"/>
           </a:xfrm>
           <a:prstGeom prst="rect">
             <a:avLst/>
@@ -880,7 +880,7 @@
         <p:spPr>
           <a:xfrm>
             <a:off x="3884760" y="8685360"/>
-            <a:ext cx="2970360" cy="457200"/>
+            <a:ext cx="2970000" cy="456840"/>
           </a:xfrm>
           <a:prstGeom prst="rect">
             <a:avLst/>
@@ -924,7 +924,7 @@
                 <a:tab pos="0" algn="l"/>
               </a:tabLst>
             </a:pPr>
-            <a:fld id="{8BE79549-D37F-4DD6-A30A-9D4CFA20E2E0}" type="slidenum">
+            <a:fld id="{81DE7211-493C-461D-946E-F1A0B1E55806}" type="slidenum">
               <a:rPr lang="en-US" sz="1200" b="0" u="none" strike="noStrike">
                 <a:solidFill>
                   <a:schemeClr val="dk1"/>
@@ -934,7 +934,7 @@
                 <a:latin typeface="+mn-lt"/>
                 <a:ea typeface="+mn-ea"/>
               </a:rPr>
-              <a:t>1</a:t>
+              <a:t>&lt;number&gt;</a:t>
             </a:fld>
             <a:endParaRPr lang="en-GB" sz="1200" b="0" u="none" strike="noStrike">
               <a:solidFill>
@@ -982,7 +982,7 @@
         <p:spPr>
           <a:xfrm>
             <a:off x="685800" y="1143000"/>
-            <a:ext cx="5484960" cy="3084840"/>
+            <a:ext cx="5484600" cy="3084480"/>
           </a:xfrm>
           <a:prstGeom prst="rect">
             <a:avLst/>
@@ -1005,7 +1005,7 @@
         <p:spPr>
           <a:xfrm>
             <a:off x="685800" y="4400640"/>
-            <a:ext cx="5484960" cy="3598920"/>
+            <a:ext cx="5484600" cy="3598560"/>
           </a:xfrm>
           <a:prstGeom prst="rect">
             <a:avLst/>
@@ -1064,7 +1064,7 @@
         <p:spPr>
           <a:xfrm>
             <a:off x="3884760" y="8685360"/>
-            <a:ext cx="2970360" cy="457200"/>
+            <a:ext cx="2970000" cy="456840"/>
           </a:xfrm>
           <a:prstGeom prst="rect">
             <a:avLst/>
@@ -1108,7 +1108,7 @@
                 <a:tab pos="0" algn="l"/>
               </a:tabLst>
             </a:pPr>
-            <a:fld id="{63A3CDF8-6D7B-49EB-952C-574661CDA64D}" type="slidenum">
+            <a:fld id="{C7DA35B2-5994-4AC6-8219-A1FFD32F62FA}" type="slidenum">
               <a:rPr lang="en-US" sz="1200" b="0" u="none" strike="noStrike">
                 <a:solidFill>
                   <a:schemeClr val="dk1"/>
@@ -1118,7 +1118,7 @@
                 <a:latin typeface="+mn-lt"/>
                 <a:ea typeface="+mn-ea"/>
               </a:rPr>
-              <a:t>1</a:t>
+              <a:t>&lt;number&gt;</a:t>
             </a:fld>
             <a:endParaRPr lang="en-GB" sz="1200" b="0" u="none" strike="noStrike">
               <a:solidFill>
@@ -1166,7 +1166,7 @@
         <p:spPr>
           <a:xfrm>
             <a:off x="685800" y="1143000"/>
-            <a:ext cx="5484960" cy="3084840"/>
+            <a:ext cx="5484600" cy="3084480"/>
           </a:xfrm>
           <a:prstGeom prst="rect">
             <a:avLst/>
@@ -1189,7 +1189,7 @@
         <p:spPr>
           <a:xfrm>
             <a:off x="685800" y="4400640"/>
-            <a:ext cx="5484960" cy="3598920"/>
+            <a:ext cx="5484600" cy="3598560"/>
           </a:xfrm>
           <a:prstGeom prst="rect">
             <a:avLst/>
@@ -1248,7 +1248,7 @@
         <p:spPr>
           <a:xfrm>
             <a:off x="3884760" y="8685360"/>
-            <a:ext cx="2970360" cy="457200"/>
+            <a:ext cx="2970000" cy="456840"/>
           </a:xfrm>
           <a:prstGeom prst="rect">
             <a:avLst/>
@@ -1292,7 +1292,7 @@
                 <a:tab pos="0" algn="l"/>
               </a:tabLst>
             </a:pPr>
-            <a:fld id="{D1A97689-474D-4731-9849-7047FA025867}" type="slidenum">
+            <a:fld id="{3AB90F10-3A67-4B38-8FCB-F0443841BFF8}" type="slidenum">
               <a:rPr lang="en-US" sz="1200" b="0" u="none" strike="noStrike">
                 <a:solidFill>
                   <a:schemeClr val="dk1"/>
@@ -1302,7 +1302,7 @@
                 <a:latin typeface="+mn-lt"/>
                 <a:ea typeface="+mn-ea"/>
               </a:rPr>
-              <a:t>1</a:t>
+              <a:t>&lt;number&gt;</a:t>
             </a:fld>
             <a:endParaRPr lang="en-GB" sz="1200" b="0" u="none" strike="noStrike">
               <a:solidFill>
@@ -1350,7 +1350,7 @@
         <p:spPr>
           <a:xfrm>
             <a:off x="685800" y="1143000"/>
-            <a:ext cx="5484960" cy="3084840"/>
+            <a:ext cx="5484600" cy="3084480"/>
           </a:xfrm>
           <a:prstGeom prst="rect">
             <a:avLst/>
@@ -1373,7 +1373,7 @@
         <p:spPr>
           <a:xfrm>
             <a:off x="685800" y="4400640"/>
-            <a:ext cx="5484960" cy="3598920"/>
+            <a:ext cx="5484600" cy="3598560"/>
           </a:xfrm>
           <a:prstGeom prst="rect">
             <a:avLst/>
@@ -1432,7 +1432,7 @@
         <p:spPr>
           <a:xfrm>
             <a:off x="3884760" y="8685360"/>
-            <a:ext cx="2970360" cy="457200"/>
+            <a:ext cx="2970000" cy="456840"/>
           </a:xfrm>
           <a:prstGeom prst="rect">
             <a:avLst/>
@@ -1476,7 +1476,7 @@
                 <a:tab pos="0" algn="l"/>
               </a:tabLst>
             </a:pPr>
-            <a:fld id="{5B8AE784-0FCF-44DC-B1AE-1ACE867D621A}" type="slidenum">
+            <a:fld id="{596191F5-CB9B-41D7-AA79-04C802E4195D}" type="slidenum">
               <a:rPr lang="en-US" sz="1200" b="0" u="none" strike="noStrike">
                 <a:solidFill>
                   <a:schemeClr val="dk1"/>
@@ -1486,7 +1486,7 @@
                 <a:latin typeface="+mn-lt"/>
                 <a:ea typeface="+mn-ea"/>
               </a:rPr>
-              <a:t>1</a:t>
+              <a:t>&lt;number&gt;</a:t>
             </a:fld>
             <a:endParaRPr lang="en-GB" sz="1200" b="0" u="none" strike="noStrike">
               <a:solidFill>
@@ -1534,7 +1534,7 @@
         <p:spPr>
           <a:xfrm>
             <a:off x="685800" y="1143000"/>
-            <a:ext cx="5484960" cy="3084840"/>
+            <a:ext cx="5484600" cy="3084480"/>
           </a:xfrm>
           <a:prstGeom prst="rect">
             <a:avLst/>
@@ -1557,7 +1557,7 @@
         <p:spPr>
           <a:xfrm>
             <a:off x="685800" y="4400640"/>
-            <a:ext cx="5484960" cy="3598920"/>
+            <a:ext cx="5484600" cy="3598560"/>
           </a:xfrm>
           <a:prstGeom prst="rect">
             <a:avLst/>
@@ -1616,7 +1616,7 @@
         <p:spPr>
           <a:xfrm>
             <a:off x="3884760" y="8685360"/>
-            <a:ext cx="2970360" cy="457200"/>
+            <a:ext cx="2970000" cy="456840"/>
           </a:xfrm>
           <a:prstGeom prst="rect">
             <a:avLst/>
@@ -1660,7 +1660,7 @@
                 <a:tab pos="0" algn="l"/>
               </a:tabLst>
             </a:pPr>
-            <a:fld id="{DC8EA2A3-1F65-446B-B0CD-9DE396B32EB4}" type="slidenum">
+            <a:fld id="{E65242E3-64BA-40FA-8343-27D6B9A451A7}" type="slidenum">
               <a:rPr lang="en-US" sz="1200" b="0" u="none" strike="noStrike">
                 <a:solidFill>
                   <a:schemeClr val="dk1"/>
@@ -1670,7 +1670,7 @@
                 <a:latin typeface="+mn-lt"/>
                 <a:ea typeface="+mn-ea"/>
               </a:rPr>
-              <a:t>1</a:t>
+              <a:t>&lt;number&gt;</a:t>
             </a:fld>
             <a:endParaRPr lang="en-GB" sz="1200" b="0" u="none" strike="noStrike">
               <a:solidFill>
@@ -1718,7 +1718,7 @@
         <p:spPr>
           <a:xfrm>
             <a:off x="685800" y="1143000"/>
-            <a:ext cx="5484960" cy="3084840"/>
+            <a:ext cx="5484600" cy="3084480"/>
           </a:xfrm>
           <a:prstGeom prst="rect">
             <a:avLst/>
@@ -1741,7 +1741,7 @@
         <p:spPr>
           <a:xfrm>
             <a:off x="685800" y="4400640"/>
-            <a:ext cx="5484960" cy="3598920"/>
+            <a:ext cx="5484600" cy="3598560"/>
           </a:xfrm>
           <a:prstGeom prst="rect">
             <a:avLst/>
@@ -1800,7 +1800,7 @@
         <p:spPr>
           <a:xfrm>
             <a:off x="3884760" y="8685360"/>
-            <a:ext cx="2970360" cy="457200"/>
+            <a:ext cx="2970000" cy="456840"/>
           </a:xfrm>
           <a:prstGeom prst="rect">
             <a:avLst/>
@@ -1844,7 +1844,7 @@
                 <a:tab pos="0" algn="l"/>
               </a:tabLst>
             </a:pPr>
-            <a:fld id="{802429B0-9FBD-489A-8C90-37B5B3F35D43}" type="slidenum">
+            <a:fld id="{EE229271-7375-4E76-8591-0B4AAA7FF3E0}" type="slidenum">
               <a:rPr lang="en-US" sz="1200" b="0" u="none" strike="noStrike">
                 <a:solidFill>
                   <a:schemeClr val="dk1"/>
@@ -1854,7 +1854,7 @@
                 <a:latin typeface="+mn-lt"/>
                 <a:ea typeface="+mn-ea"/>
               </a:rPr>
-              <a:t>1</a:t>
+              <a:t>&lt;number&gt;</a:t>
             </a:fld>
             <a:endParaRPr lang="en-GB" sz="1200" b="0" u="none" strike="noStrike">
               <a:solidFill>
@@ -1902,7 +1902,7 @@
         <p:spPr>
           <a:xfrm>
             <a:off x="685800" y="1143000"/>
-            <a:ext cx="5484960" cy="3084840"/>
+            <a:ext cx="5484600" cy="3084480"/>
           </a:xfrm>
           <a:prstGeom prst="rect">
             <a:avLst/>
@@ -1925,7 +1925,7 @@
         <p:spPr>
           <a:xfrm>
             <a:off x="685800" y="4400640"/>
-            <a:ext cx="5484960" cy="3598920"/>
+            <a:ext cx="5484600" cy="3598560"/>
           </a:xfrm>
           <a:prstGeom prst="rect">
             <a:avLst/>
@@ -1984,7 +1984,7 @@
         <p:spPr>
           <a:xfrm>
             <a:off x="3884760" y="8685360"/>
-            <a:ext cx="2970360" cy="457200"/>
+            <a:ext cx="2970000" cy="456840"/>
           </a:xfrm>
           <a:prstGeom prst="rect">
             <a:avLst/>
@@ -2028,7 +2028,7 @@
                 <a:tab pos="0" algn="l"/>
               </a:tabLst>
             </a:pPr>
-            <a:fld id="{0A1AB073-5F6A-4477-BBA5-BB6B70D12101}" type="slidenum">
+            <a:fld id="{906FCD33-695C-4C54-BB6B-0933F1562E29}" type="slidenum">
               <a:rPr lang="en-US" sz="1200" b="0" u="none" strike="noStrike">
                 <a:solidFill>
                   <a:schemeClr val="dk1"/>
@@ -2604,7 +2604,7 @@
         <p:spPr>
           <a:xfrm>
             <a:off x="8778240" y="-2011680"/>
-            <a:ext cx="5667840" cy="5667840"/>
+            <a:ext cx="5667480" cy="5667480"/>
           </a:xfrm>
           <a:prstGeom prst="ellipse">
             <a:avLst/>
@@ -2647,7 +2647,7 @@
         <p:spPr>
           <a:xfrm>
             <a:off x="-2286000" y="4389120"/>
-            <a:ext cx="4570560" cy="4570560"/>
+            <a:ext cx="4570200" cy="4570200"/>
           </a:xfrm>
           <a:prstGeom prst="ellipse">
             <a:avLst/>
@@ -2690,7 +2690,7 @@
         <p:spPr>
           <a:xfrm>
             <a:off x="822960" y="2331720"/>
-            <a:ext cx="10056960" cy="364320"/>
+            <a:ext cx="10056600" cy="363960"/>
           </a:xfrm>
           <a:prstGeom prst="rect">
             <a:avLst/>
@@ -2751,7 +2751,7 @@
         <p:spPr>
           <a:xfrm>
             <a:off x="777240" y="2697480"/>
-            <a:ext cx="10514160" cy="1187280"/>
+            <a:ext cx="10513800" cy="1186920"/>
           </a:xfrm>
           <a:prstGeom prst="rect">
             <a:avLst/>
@@ -2812,7 +2812,7 @@
         <p:spPr>
           <a:xfrm>
             <a:off x="822960" y="3794760"/>
-            <a:ext cx="9599760" cy="730080"/>
+            <a:ext cx="9599400" cy="729720"/>
           </a:xfrm>
           <a:prstGeom prst="rect">
             <a:avLst/>
@@ -2873,7 +2873,7 @@
         <p:spPr>
           <a:xfrm>
             <a:off x="822960" y="5989320"/>
-            <a:ext cx="126720" cy="126720"/>
+            <a:ext cx="126360" cy="126360"/>
           </a:xfrm>
           <a:prstGeom prst="rect">
             <a:avLst/>
@@ -2916,7 +2916,7 @@
         <p:spPr>
           <a:xfrm>
             <a:off x="1097280" y="5870520"/>
-            <a:ext cx="7313760" cy="364320"/>
+            <a:ext cx="7313400" cy="363960"/>
           </a:xfrm>
           <a:prstGeom prst="rect">
             <a:avLst/>
@@ -3014,7 +3014,7 @@
         <p:spPr>
           <a:xfrm>
             <a:off x="548640" y="411480"/>
-            <a:ext cx="7313760" cy="318600"/>
+            <a:ext cx="7313400" cy="318240"/>
           </a:xfrm>
           <a:prstGeom prst="rect">
             <a:avLst/>
@@ -3075,7 +3075,7 @@
         <p:spPr>
           <a:xfrm>
             <a:off x="548640" y="713160"/>
-            <a:ext cx="11062800" cy="821520"/>
+            <a:ext cx="11062440" cy="821160"/>
           </a:xfrm>
           <a:prstGeom prst="rect">
             <a:avLst/>
@@ -3136,7 +3136,7 @@
         <p:spPr>
           <a:xfrm>
             <a:off x="548640" y="1874520"/>
-            <a:ext cx="821520" cy="775800"/>
+            <a:ext cx="821160" cy="775440"/>
           </a:xfrm>
           <a:prstGeom prst="rect">
             <a:avLst/>
@@ -3197,7 +3197,7 @@
         <p:spPr>
           <a:xfrm>
             <a:off x="1554480" y="1892880"/>
-            <a:ext cx="4204800" cy="364320"/>
+            <a:ext cx="4204440" cy="363960"/>
           </a:xfrm>
           <a:prstGeom prst="rect">
             <a:avLst/>
@@ -3258,7 +3258,7 @@
         <p:spPr>
           <a:xfrm>
             <a:off x="1554480" y="2240280"/>
-            <a:ext cx="8045280" cy="364320"/>
+            <a:ext cx="8044920" cy="363960"/>
           </a:xfrm>
           <a:prstGeom prst="rect">
             <a:avLst/>
@@ -3319,7 +3319,7 @@
         <p:spPr>
           <a:xfrm>
             <a:off x="548640" y="2752200"/>
-            <a:ext cx="821520" cy="775800"/>
+            <a:ext cx="821160" cy="775440"/>
           </a:xfrm>
           <a:prstGeom prst="rect">
             <a:avLst/>
@@ -3380,7 +3380,7 @@
         <p:spPr>
           <a:xfrm>
             <a:off x="1554480" y="2770560"/>
-            <a:ext cx="4204800" cy="364320"/>
+            <a:ext cx="4204440" cy="363960"/>
           </a:xfrm>
           <a:prstGeom prst="rect">
             <a:avLst/>
@@ -3441,7 +3441,7 @@
         <p:spPr>
           <a:xfrm>
             <a:off x="1554480" y="3117960"/>
-            <a:ext cx="8045280" cy="364320"/>
+            <a:ext cx="8044920" cy="363960"/>
           </a:xfrm>
           <a:prstGeom prst="rect">
             <a:avLst/>
@@ -3502,7 +3502,7 @@
         <p:spPr>
           <a:xfrm>
             <a:off x="548640" y="3630240"/>
-            <a:ext cx="821520" cy="775800"/>
+            <a:ext cx="821160" cy="775440"/>
           </a:xfrm>
           <a:prstGeom prst="rect">
             <a:avLst/>
@@ -3563,7 +3563,7 @@
         <p:spPr>
           <a:xfrm>
             <a:off x="1554480" y="3648600"/>
-            <a:ext cx="4204800" cy="364320"/>
+            <a:ext cx="4204440" cy="363960"/>
           </a:xfrm>
           <a:prstGeom prst="rect">
             <a:avLst/>
@@ -3624,7 +3624,7 @@
         <p:spPr>
           <a:xfrm>
             <a:off x="1554480" y="3996000"/>
-            <a:ext cx="8045280" cy="364320"/>
+            <a:ext cx="8044920" cy="363960"/>
           </a:xfrm>
           <a:prstGeom prst="rect">
             <a:avLst/>
@@ -3685,7 +3685,7 @@
         <p:spPr>
           <a:xfrm>
             <a:off x="548640" y="4507920"/>
-            <a:ext cx="821520" cy="775800"/>
+            <a:ext cx="821160" cy="775440"/>
           </a:xfrm>
           <a:prstGeom prst="rect">
             <a:avLst/>
@@ -3746,7 +3746,7 @@
         <p:spPr>
           <a:xfrm>
             <a:off x="1554480" y="4526280"/>
-            <a:ext cx="4204800" cy="364320"/>
+            <a:ext cx="4204440" cy="363960"/>
           </a:xfrm>
           <a:prstGeom prst="rect">
             <a:avLst/>
@@ -3807,7 +3807,7 @@
         <p:spPr>
           <a:xfrm>
             <a:off x="1554480" y="4873680"/>
-            <a:ext cx="8045280" cy="364320"/>
+            <a:ext cx="8044920" cy="363960"/>
           </a:xfrm>
           <a:prstGeom prst="rect">
             <a:avLst/>
@@ -3868,7 +3868,7 @@
         <p:spPr>
           <a:xfrm>
             <a:off x="548640" y="5385960"/>
-            <a:ext cx="821520" cy="775800"/>
+            <a:ext cx="821160" cy="775440"/>
           </a:xfrm>
           <a:prstGeom prst="rect">
             <a:avLst/>
@@ -3929,7 +3929,7 @@
         <p:spPr>
           <a:xfrm>
             <a:off x="1554480" y="5403960"/>
-            <a:ext cx="4204800" cy="364320"/>
+            <a:ext cx="4204440" cy="363960"/>
           </a:xfrm>
           <a:prstGeom prst="rect">
             <a:avLst/>
@@ -3990,7 +3990,7 @@
         <p:spPr>
           <a:xfrm>
             <a:off x="1554480" y="5751720"/>
-            <a:ext cx="8045280" cy="364320"/>
+            <a:ext cx="8044920" cy="363960"/>
           </a:xfrm>
           <a:prstGeom prst="rect">
             <a:avLst/>
@@ -4051,7 +4051,7 @@
         <p:spPr>
           <a:xfrm>
             <a:off x="11548800" y="6400800"/>
-            <a:ext cx="364320" cy="272880"/>
+            <a:ext cx="363960" cy="272520"/>
           </a:xfrm>
           <a:prstGeom prst="rect">
             <a:avLst/>
@@ -4149,7 +4149,7 @@
         <p:spPr>
           <a:xfrm>
             <a:off x="548640" y="411480"/>
-            <a:ext cx="7313760" cy="318600"/>
+            <a:ext cx="7313400" cy="318240"/>
           </a:xfrm>
           <a:prstGeom prst="rect">
             <a:avLst/>
@@ -4210,7 +4210,7 @@
         <p:spPr>
           <a:xfrm>
             <a:off x="548640" y="713160"/>
-            <a:ext cx="11062800" cy="821520"/>
+            <a:ext cx="11062440" cy="821160"/>
           </a:xfrm>
           <a:prstGeom prst="rect">
             <a:avLst/>
@@ -4271,7 +4271,7 @@
         <p:spPr>
           <a:xfrm>
             <a:off x="548640" y="1783080"/>
-            <a:ext cx="5942160" cy="1827360"/>
+            <a:ext cx="5941800" cy="1827000"/>
           </a:xfrm>
           <a:prstGeom prst="rect">
             <a:avLst/>
@@ -4332,7 +4332,7 @@
         <p:spPr>
           <a:xfrm>
             <a:off x="548640" y="3794760"/>
-            <a:ext cx="5942160" cy="318600"/>
+            <a:ext cx="5941800" cy="318240"/>
           </a:xfrm>
           <a:prstGeom prst="rect">
             <a:avLst/>
@@ -4393,7 +4393,7 @@
         <p:spPr>
           <a:xfrm>
             <a:off x="548640" y="4160520"/>
-            <a:ext cx="5942160" cy="1370160"/>
+            <a:ext cx="5941800" cy="1369800"/>
           </a:xfrm>
           <a:prstGeom prst="roundRect">
             <a:avLst>
@@ -4438,7 +4438,7 @@
         <p:spPr>
           <a:xfrm>
             <a:off x="822960" y="4297680"/>
-            <a:ext cx="5393520" cy="1095840"/>
+            <a:ext cx="5393160" cy="1095480"/>
           </a:xfrm>
           <a:prstGeom prst="rect">
             <a:avLst/>
@@ -4499,7 +4499,7 @@
         <p:spPr>
           <a:xfrm>
             <a:off x="6903720" y="1783080"/>
-            <a:ext cx="4753440" cy="4159080"/>
+            <a:ext cx="4753080" cy="4158720"/>
           </a:xfrm>
           <a:prstGeom prst="roundRect">
             <a:avLst>
@@ -4544,7 +4544,7 @@
         <p:spPr>
           <a:xfrm>
             <a:off x="7223760" y="2011680"/>
-            <a:ext cx="4113360" cy="364320"/>
+            <a:ext cx="4113000" cy="363960"/>
           </a:xfrm>
           <a:prstGeom prst="rect">
             <a:avLst/>
@@ -4605,7 +4605,7 @@
         <p:spPr>
           <a:xfrm>
             <a:off x="7223760" y="2541960"/>
-            <a:ext cx="199800" cy="199800"/>
+            <a:ext cx="199440" cy="199440"/>
           </a:xfrm>
           <a:prstGeom prst="ellipse">
             <a:avLst/>
@@ -4648,7 +4648,7 @@
         <p:spPr>
           <a:xfrm>
             <a:off x="7223760" y="2541960"/>
-            <a:ext cx="199800" cy="199800"/>
+            <a:ext cx="199440" cy="199440"/>
           </a:xfrm>
           <a:prstGeom prst="rect">
             <a:avLst/>
@@ -4709,7 +4709,7 @@
         <p:spPr>
           <a:xfrm>
             <a:off x="7589520" y="2514600"/>
-            <a:ext cx="3839040" cy="318600"/>
+            <a:ext cx="3838680" cy="318240"/>
           </a:xfrm>
           <a:prstGeom prst="rect">
             <a:avLst/>
@@ -4770,7 +4770,7 @@
         <p:spPr>
           <a:xfrm>
             <a:off x="7223760" y="3090600"/>
-            <a:ext cx="199800" cy="199800"/>
+            <a:ext cx="199440" cy="199440"/>
           </a:xfrm>
           <a:prstGeom prst="ellipse">
             <a:avLst/>
@@ -4813,7 +4813,7 @@
         <p:spPr>
           <a:xfrm>
             <a:off x="7223760" y="3090600"/>
-            <a:ext cx="199800" cy="199800"/>
+            <a:ext cx="199440" cy="199440"/>
           </a:xfrm>
           <a:prstGeom prst="rect">
             <a:avLst/>
@@ -4874,7 +4874,7 @@
         <p:spPr>
           <a:xfrm>
             <a:off x="7589520" y="3063240"/>
-            <a:ext cx="3839040" cy="318600"/>
+            <a:ext cx="3838680" cy="318240"/>
           </a:xfrm>
           <a:prstGeom prst="rect">
             <a:avLst/>
@@ -4935,7 +4935,7 @@
         <p:spPr>
           <a:xfrm>
             <a:off x="7223760" y="3639240"/>
-            <a:ext cx="199800" cy="199800"/>
+            <a:ext cx="199440" cy="199440"/>
           </a:xfrm>
           <a:prstGeom prst="ellipse">
             <a:avLst/>
@@ -4978,7 +4978,7 @@
         <p:spPr>
           <a:xfrm>
             <a:off x="7223760" y="3639240"/>
-            <a:ext cx="199800" cy="199800"/>
+            <a:ext cx="199440" cy="199440"/>
           </a:xfrm>
           <a:prstGeom prst="rect">
             <a:avLst/>
@@ -5039,7 +5039,7 @@
         <p:spPr>
           <a:xfrm>
             <a:off x="7589520" y="3611880"/>
-            <a:ext cx="3839040" cy="318600"/>
+            <a:ext cx="3838680" cy="318240"/>
           </a:xfrm>
           <a:prstGeom prst="rect">
             <a:avLst/>
@@ -5100,7 +5100,7 @@
         <p:spPr>
           <a:xfrm>
             <a:off x="7223760" y="4187880"/>
-            <a:ext cx="199800" cy="199800"/>
+            <a:ext cx="199440" cy="199440"/>
           </a:xfrm>
           <a:prstGeom prst="ellipse">
             <a:avLst/>
@@ -5143,7 +5143,7 @@
         <p:spPr>
           <a:xfrm>
             <a:off x="7223760" y="4187880"/>
-            <a:ext cx="199800" cy="199800"/>
+            <a:ext cx="199440" cy="199440"/>
           </a:xfrm>
           <a:prstGeom prst="rect">
             <a:avLst/>
@@ -5204,7 +5204,7 @@
         <p:spPr>
           <a:xfrm>
             <a:off x="7589520" y="4160520"/>
-            <a:ext cx="3839040" cy="318600"/>
+            <a:ext cx="3838680" cy="318240"/>
           </a:xfrm>
           <a:prstGeom prst="rect">
             <a:avLst/>
@@ -5265,7 +5265,7 @@
         <p:spPr>
           <a:xfrm>
             <a:off x="7223760" y="4736520"/>
-            <a:ext cx="199800" cy="199800"/>
+            <a:ext cx="199440" cy="199440"/>
           </a:xfrm>
           <a:prstGeom prst="ellipse">
             <a:avLst/>
@@ -5308,7 +5308,7 @@
         <p:spPr>
           <a:xfrm>
             <a:off x="7223760" y="4736520"/>
-            <a:ext cx="199800" cy="199800"/>
+            <a:ext cx="199440" cy="199440"/>
           </a:xfrm>
           <a:prstGeom prst="rect">
             <a:avLst/>
@@ -5369,7 +5369,7 @@
         <p:spPr>
           <a:xfrm>
             <a:off x="7589520" y="4709160"/>
-            <a:ext cx="3839040" cy="318600"/>
+            <a:ext cx="3838680" cy="318240"/>
           </a:xfrm>
           <a:prstGeom prst="rect">
             <a:avLst/>
@@ -5430,7 +5430,7 @@
         <p:spPr>
           <a:xfrm>
             <a:off x="7223760" y="5285160"/>
-            <a:ext cx="199800" cy="199800"/>
+            <a:ext cx="199440" cy="199440"/>
           </a:xfrm>
           <a:prstGeom prst="ellipse">
             <a:avLst/>
@@ -5473,7 +5473,7 @@
         <p:spPr>
           <a:xfrm>
             <a:off x="7223760" y="5285160"/>
-            <a:ext cx="199800" cy="199800"/>
+            <a:ext cx="199440" cy="199440"/>
           </a:xfrm>
           <a:prstGeom prst="rect">
             <a:avLst/>
@@ -5534,7 +5534,7 @@
         <p:spPr>
           <a:xfrm>
             <a:off x="7589520" y="5257800"/>
-            <a:ext cx="3839040" cy="318600"/>
+            <a:ext cx="3838680" cy="318240"/>
           </a:xfrm>
           <a:prstGeom prst="rect">
             <a:avLst/>
@@ -5595,7 +5595,7 @@
         <p:spPr>
           <a:xfrm>
             <a:off x="11548800" y="6400800"/>
-            <a:ext cx="364320" cy="272880"/>
+            <a:ext cx="363960" cy="272520"/>
           </a:xfrm>
           <a:prstGeom prst="rect">
             <a:avLst/>
@@ -5693,7 +5693,7 @@
         <p:spPr>
           <a:xfrm>
             <a:off x="548640" y="411480"/>
-            <a:ext cx="7313760" cy="318600"/>
+            <a:ext cx="7313400" cy="318240"/>
           </a:xfrm>
           <a:prstGeom prst="rect">
             <a:avLst/>
@@ -5754,7 +5754,7 @@
         <p:spPr>
           <a:xfrm>
             <a:off x="548640" y="713160"/>
-            <a:ext cx="11062800" cy="821520"/>
+            <a:ext cx="11062440" cy="821160"/>
           </a:xfrm>
           <a:prstGeom prst="rect">
             <a:avLst/>
@@ -5830,7 +5830,7 @@
         <p:spPr>
           <a:xfrm>
             <a:off x="11548800" y="6400800"/>
-            <a:ext cx="364320" cy="272880"/>
+            <a:ext cx="363960" cy="272520"/>
           </a:xfrm>
           <a:prstGeom prst="rect">
             <a:avLst/>
@@ -5895,7 +5895,7 @@
         <p:spPr>
           <a:xfrm>
             <a:off x="1691640" y="1620000"/>
-            <a:ext cx="8807760" cy="4890960"/>
+            <a:ext cx="8807400" cy="4890600"/>
           </a:xfrm>
           <a:prstGeom prst="rect">
             <a:avLst/>
@@ -5952,7 +5952,7 @@
         <p:spPr>
           <a:xfrm>
             <a:off x="548640" y="411480"/>
-            <a:ext cx="7313760" cy="318600"/>
+            <a:ext cx="7313400" cy="318240"/>
           </a:xfrm>
           <a:prstGeom prst="rect">
             <a:avLst/>
@@ -6013,7 +6013,7 @@
         <p:spPr>
           <a:xfrm>
             <a:off x="548640" y="713160"/>
-            <a:ext cx="11062800" cy="821520"/>
+            <a:ext cx="11062440" cy="821160"/>
           </a:xfrm>
           <a:prstGeom prst="rect">
             <a:avLst/>
@@ -6074,7 +6074,7 @@
         <p:spPr>
           <a:xfrm>
             <a:off x="945360" y="3854160"/>
-            <a:ext cx="4813560" cy="821520"/>
+            <a:ext cx="4813200" cy="821160"/>
           </a:xfrm>
           <a:prstGeom prst="rect">
             <a:avLst/>
@@ -6135,9 +6135,9 @@
         <p:grpSpPr>
           <a:xfrm>
             <a:off x="3765600" y="4681800"/>
-            <a:ext cx="4930920" cy="1870920"/>
+            <a:ext cx="4930560" cy="1870560"/>
             <a:chOff x="3765600" y="4681800"/>
-            <a:chExt cx="4930920" cy="1870920"/>
+            <a:chExt cx="4930560" cy="1870560"/>
           </a:xfrm>
         </p:grpSpPr>
         <p:sp>
@@ -6149,7 +6149,7 @@
           <p:spPr>
             <a:xfrm>
               <a:off x="3765600" y="4781520"/>
-              <a:ext cx="4930920" cy="1771200"/>
+              <a:ext cx="4930560" cy="1770840"/>
             </a:xfrm>
             <a:prstGeom prst="roundRect">
               <a:avLst>
@@ -6194,7 +6194,7 @@
           <p:spPr>
             <a:xfrm>
               <a:off x="3765600" y="4681800"/>
-              <a:ext cx="4930920" cy="763200"/>
+              <a:ext cx="4930560" cy="762840"/>
             </a:xfrm>
             <a:prstGeom prst="rect">
               <a:avLst/>
@@ -6255,7 +6255,7 @@
           <p:spPr>
             <a:xfrm>
               <a:off x="3765600" y="5493960"/>
-              <a:ext cx="4930920" cy="276120"/>
+              <a:ext cx="4930560" cy="275760"/>
             </a:xfrm>
             <a:prstGeom prst="rect">
               <a:avLst/>
@@ -6316,7 +6316,7 @@
           <p:spPr>
             <a:xfrm>
               <a:off x="4105800" y="5985000"/>
-              <a:ext cx="4250520" cy="450720"/>
+              <a:ext cx="4250160" cy="450360"/>
             </a:xfrm>
             <a:prstGeom prst="rect">
               <a:avLst/>
@@ -6408,7 +6408,7 @@
         <p:spPr>
           <a:xfrm>
             <a:off x="11548800" y="6400800"/>
-            <a:ext cx="364320" cy="272880"/>
+            <a:ext cx="363960" cy="272520"/>
           </a:xfrm>
           <a:prstGeom prst="rect">
             <a:avLst/>
@@ -6473,7 +6473,7 @@
         <p:spPr>
           <a:xfrm>
             <a:off x="894240" y="1805760"/>
-            <a:ext cx="4593960" cy="1793160"/>
+            <a:ext cx="4593600" cy="1792800"/>
           </a:xfrm>
           <a:prstGeom prst="rect">
             <a:avLst/>
@@ -6497,7 +6497,7 @@
         <p:spPr>
           <a:xfrm>
             <a:off x="6909120" y="1800000"/>
-            <a:ext cx="4609800" cy="1798920"/>
+            <a:ext cx="4609440" cy="1798560"/>
           </a:xfrm>
           <a:prstGeom prst="rect">
             <a:avLst/>
@@ -6517,7 +6517,7 @@
         <p:spPr>
           <a:xfrm>
             <a:off x="6845400" y="3852000"/>
-            <a:ext cx="5213520" cy="821520"/>
+            <a:ext cx="5213160" cy="821160"/>
           </a:xfrm>
           <a:prstGeom prst="rect">
             <a:avLst/>
@@ -6615,7 +6615,7 @@
         <p:spPr>
           <a:xfrm>
             <a:off x="548640" y="411480"/>
-            <a:ext cx="7313760" cy="318600"/>
+            <a:ext cx="7313400" cy="318240"/>
           </a:xfrm>
           <a:prstGeom prst="rect">
             <a:avLst/>
@@ -6676,7 +6676,7 @@
         <p:spPr>
           <a:xfrm>
             <a:off x="548640" y="713160"/>
-            <a:ext cx="11062800" cy="821520"/>
+            <a:ext cx="11062440" cy="821160"/>
           </a:xfrm>
           <a:prstGeom prst="rect">
             <a:avLst/>
@@ -6737,7 +6737,7 @@
         <p:spPr>
           <a:xfrm>
             <a:off x="1268640" y="1783080"/>
-            <a:ext cx="1771560" cy="501480"/>
+            <a:ext cx="1771200" cy="501120"/>
           </a:xfrm>
           <a:prstGeom prst="rect">
             <a:avLst/>
@@ -6798,7 +6798,7 @@
         <p:spPr>
           <a:xfrm>
             <a:off x="1287360" y="2195640"/>
-            <a:ext cx="2050920" cy="318600"/>
+            <a:ext cx="2050560" cy="318240"/>
           </a:xfrm>
           <a:prstGeom prst="rect">
             <a:avLst/>
@@ -6859,7 +6859,7 @@
         <p:spPr>
           <a:xfrm>
             <a:off x="5449680" y="1800000"/>
-            <a:ext cx="1209240" cy="501480"/>
+            <a:ext cx="1208880" cy="501120"/>
           </a:xfrm>
           <a:prstGeom prst="rect">
             <a:avLst/>
@@ -6920,7 +6920,7 @@
         <p:spPr>
           <a:xfrm>
             <a:off x="5449680" y="2176560"/>
-            <a:ext cx="1209240" cy="318600"/>
+            <a:ext cx="1208880" cy="318240"/>
           </a:xfrm>
           <a:prstGeom prst="rect">
             <a:avLst/>
@@ -6981,7 +6981,7 @@
         <p:spPr>
           <a:xfrm>
             <a:off x="7254720" y="1783080"/>
-            <a:ext cx="1564200" cy="501480"/>
+            <a:ext cx="1563840" cy="501120"/>
           </a:xfrm>
           <a:prstGeom prst="rect">
             <a:avLst/>
@@ -7042,7 +7042,7 @@
         <p:spPr>
           <a:xfrm>
             <a:off x="7254720" y="2195640"/>
-            <a:ext cx="1564200" cy="318600"/>
+            <a:ext cx="1563840" cy="318240"/>
           </a:xfrm>
           <a:prstGeom prst="rect">
             <a:avLst/>
@@ -7103,7 +7103,7 @@
         <p:spPr>
           <a:xfrm>
             <a:off x="11548800" y="6400800"/>
-            <a:ext cx="364320" cy="272880"/>
+            <a:ext cx="363960" cy="272520"/>
           </a:xfrm>
           <a:prstGeom prst="rect">
             <a:avLst/>
@@ -7168,7 +7168,7 @@
         <p:spPr>
           <a:xfrm>
             <a:off x="1371960" y="2880000"/>
-            <a:ext cx="8886960" cy="3418920"/>
+            <a:ext cx="8886600" cy="3418560"/>
           </a:xfrm>
           <a:prstGeom prst="rect">
             <a:avLst/>
@@ -7188,7 +7188,7 @@
         <p:spPr>
           <a:xfrm>
             <a:off x="3320640" y="1783080"/>
-            <a:ext cx="1771560" cy="501480"/>
+            <a:ext cx="1771200" cy="501120"/>
           </a:xfrm>
           <a:prstGeom prst="rect">
             <a:avLst/>
@@ -7249,7 +7249,7 @@
         <p:spPr>
           <a:xfrm>
             <a:off x="3339360" y="2267640"/>
-            <a:ext cx="1879560" cy="318600"/>
+            <a:ext cx="1879200" cy="318240"/>
           </a:xfrm>
           <a:prstGeom prst="rect">
             <a:avLst/>
@@ -7347,7 +7347,7 @@
         <p:spPr>
           <a:xfrm>
             <a:off x="548640" y="440280"/>
-            <a:ext cx="7313760" cy="318600"/>
+            <a:ext cx="7313400" cy="318240"/>
           </a:xfrm>
           <a:prstGeom prst="rect">
             <a:avLst/>
@@ -7408,7 +7408,7 @@
         <p:spPr>
           <a:xfrm>
             <a:off x="548640" y="741960"/>
-            <a:ext cx="11062800" cy="821520"/>
+            <a:ext cx="11062440" cy="821160"/>
           </a:xfrm>
           <a:prstGeom prst="rect">
             <a:avLst/>
@@ -7469,7 +7469,7 @@
         <p:spPr>
           <a:xfrm>
             <a:off x="548640" y="1811880"/>
-            <a:ext cx="5393520" cy="1278720"/>
+            <a:ext cx="5393160" cy="1278360"/>
           </a:xfrm>
           <a:prstGeom prst="rect">
             <a:avLst/>
@@ -7530,7 +7530,7 @@
         <p:spPr>
           <a:xfrm>
             <a:off x="548640" y="3310920"/>
-            <a:ext cx="5393520" cy="2696040"/>
+            <a:ext cx="5393160" cy="2695680"/>
           </a:xfrm>
           <a:prstGeom prst="roundRect">
             <a:avLst>
@@ -7575,7 +7575,7 @@
         <p:spPr>
           <a:xfrm>
             <a:off x="822960" y="3485160"/>
-            <a:ext cx="4844880" cy="318600"/>
+            <a:ext cx="4844520" cy="318240"/>
           </a:xfrm>
           <a:prstGeom prst="rect">
             <a:avLst/>
@@ -7696,7 +7696,7 @@
         <p:spPr>
           <a:xfrm>
             <a:off x="6309360" y="1811880"/>
-            <a:ext cx="5302080" cy="318600"/>
+            <a:ext cx="5301720" cy="318240"/>
           </a:xfrm>
           <a:prstGeom prst="rect">
             <a:avLst/>
@@ -7757,7 +7757,7 @@
         <p:spPr>
           <a:xfrm>
             <a:off x="6309360" y="5148000"/>
-            <a:ext cx="5302080" cy="821520"/>
+            <a:ext cx="5301720" cy="821160"/>
           </a:xfrm>
           <a:prstGeom prst="rect">
             <a:avLst/>
@@ -7851,7 +7851,7 @@
         <p:spPr>
           <a:xfrm>
             <a:off x="11548800" y="6429600"/>
-            <a:ext cx="364320" cy="272880"/>
+            <a:ext cx="363960" cy="272520"/>
           </a:xfrm>
           <a:prstGeom prst="rect">
             <a:avLst/>
@@ -7916,7 +7916,7 @@
         <p:spPr>
           <a:xfrm>
             <a:off x="972000" y="3977640"/>
-            <a:ext cx="4498920" cy="1961280"/>
+            <a:ext cx="4498560" cy="1960920"/>
           </a:xfrm>
           <a:prstGeom prst="rect">
             <a:avLst/>
@@ -7940,7 +7940,7 @@
         <p:spPr>
           <a:xfrm>
             <a:off x="6316560" y="2129040"/>
-            <a:ext cx="5454720" cy="2665440"/>
+            <a:ext cx="5454360" cy="2665080"/>
           </a:xfrm>
           <a:prstGeom prst="rect">
             <a:avLst/>
@@ -7997,7 +7997,7 @@
         <p:spPr>
           <a:xfrm>
             <a:off x="548640" y="411480"/>
-            <a:ext cx="7313760" cy="318600"/>
+            <a:ext cx="7313400" cy="318240"/>
           </a:xfrm>
           <a:prstGeom prst="rect">
             <a:avLst/>
@@ -8058,7 +8058,7 @@
         <p:spPr>
           <a:xfrm>
             <a:off x="548640" y="713160"/>
-            <a:ext cx="11062800" cy="821520"/>
+            <a:ext cx="11062440" cy="821160"/>
           </a:xfrm>
           <a:prstGeom prst="rect">
             <a:avLst/>
@@ -8119,7 +8119,7 @@
         <p:spPr>
           <a:xfrm>
             <a:off x="548640" y="1783080"/>
-            <a:ext cx="455760" cy="455760"/>
+            <a:ext cx="455400" cy="455400"/>
           </a:xfrm>
           <a:prstGeom prst="roundRect">
             <a:avLst>
@@ -8164,7 +8164,7 @@
         <p:spPr>
           <a:xfrm>
             <a:off x="548640" y="1783080"/>
-            <a:ext cx="455760" cy="455760"/>
+            <a:ext cx="455400" cy="455400"/>
           </a:xfrm>
           <a:prstGeom prst="rect">
             <a:avLst/>
@@ -8225,7 +8225,7 @@
         <p:spPr>
           <a:xfrm>
             <a:off x="1234440" y="1755720"/>
-            <a:ext cx="10056960" cy="364320"/>
+            <a:ext cx="10056600" cy="363960"/>
           </a:xfrm>
           <a:prstGeom prst="rect">
             <a:avLst/>
@@ -8286,7 +8286,7 @@
         <p:spPr>
           <a:xfrm>
             <a:off x="1234440" y="2112120"/>
-            <a:ext cx="10056960" cy="547200"/>
+            <a:ext cx="10056600" cy="546840"/>
           </a:xfrm>
           <a:prstGeom prst="rect">
             <a:avLst/>
@@ -8347,7 +8347,7 @@
         <p:spPr>
           <a:xfrm>
             <a:off x="548640" y="2834640"/>
-            <a:ext cx="455760" cy="455760"/>
+            <a:ext cx="455400" cy="455400"/>
           </a:xfrm>
           <a:prstGeom prst="roundRect">
             <a:avLst>
@@ -8392,7 +8392,7 @@
         <p:spPr>
           <a:xfrm>
             <a:off x="548640" y="2834640"/>
-            <a:ext cx="455760" cy="455760"/>
+            <a:ext cx="455400" cy="455400"/>
           </a:xfrm>
           <a:prstGeom prst="rect">
             <a:avLst/>
@@ -8453,7 +8453,7 @@
         <p:spPr>
           <a:xfrm>
             <a:off x="1234440" y="2807280"/>
-            <a:ext cx="10056960" cy="364320"/>
+            <a:ext cx="10056600" cy="363960"/>
           </a:xfrm>
           <a:prstGeom prst="rect">
             <a:avLst/>
@@ -8514,7 +8514,7 @@
         <p:spPr>
           <a:xfrm>
             <a:off x="1234440" y="3163680"/>
-            <a:ext cx="10056960" cy="547200"/>
+            <a:ext cx="10056600" cy="546840"/>
           </a:xfrm>
           <a:prstGeom prst="rect">
             <a:avLst/>
@@ -8575,7 +8575,7 @@
         <p:spPr>
           <a:xfrm>
             <a:off x="548640" y="3886200"/>
-            <a:ext cx="455760" cy="455760"/>
+            <a:ext cx="455400" cy="455400"/>
           </a:xfrm>
           <a:prstGeom prst="roundRect">
             <a:avLst>
@@ -8620,7 +8620,7 @@
         <p:spPr>
           <a:xfrm>
             <a:off x="548640" y="3886200"/>
-            <a:ext cx="455760" cy="455760"/>
+            <a:ext cx="455400" cy="455400"/>
           </a:xfrm>
           <a:prstGeom prst="rect">
             <a:avLst/>
@@ -8681,7 +8681,7 @@
         <p:spPr>
           <a:xfrm>
             <a:off x="1234440" y="3858840"/>
-            <a:ext cx="10056960" cy="364320"/>
+            <a:ext cx="10056600" cy="363960"/>
           </a:xfrm>
           <a:prstGeom prst="rect">
             <a:avLst/>
@@ -8742,7 +8742,7 @@
         <p:spPr>
           <a:xfrm>
             <a:off x="1234440" y="4215240"/>
-            <a:ext cx="10056960" cy="547200"/>
+            <a:ext cx="10056600" cy="546840"/>
           </a:xfrm>
           <a:prstGeom prst="rect">
             <a:avLst/>
@@ -8803,7 +8803,7 @@
         <p:spPr>
           <a:xfrm>
             <a:off x="548640" y="4937760"/>
-            <a:ext cx="455760" cy="455760"/>
+            <a:ext cx="455400" cy="455400"/>
           </a:xfrm>
           <a:prstGeom prst="roundRect">
             <a:avLst>
@@ -8848,7 +8848,7 @@
         <p:spPr>
           <a:xfrm>
             <a:off x="548640" y="4937760"/>
-            <a:ext cx="455760" cy="455760"/>
+            <a:ext cx="455400" cy="455400"/>
           </a:xfrm>
           <a:prstGeom prst="rect">
             <a:avLst/>
@@ -8909,7 +8909,7 @@
         <p:spPr>
           <a:xfrm>
             <a:off x="1234440" y="4910400"/>
-            <a:ext cx="10056960" cy="364320"/>
+            <a:ext cx="10056600" cy="363960"/>
           </a:xfrm>
           <a:prstGeom prst="rect">
             <a:avLst/>
@@ -8970,7 +8970,7 @@
         <p:spPr>
           <a:xfrm>
             <a:off x="1234440" y="5266800"/>
-            <a:ext cx="10056960" cy="547200"/>
+            <a:ext cx="10056600" cy="546840"/>
           </a:xfrm>
           <a:prstGeom prst="rect">
             <a:avLst/>
@@ -9031,7 +9031,7 @@
         <p:spPr>
           <a:xfrm>
             <a:off x="11548800" y="6400800"/>
-            <a:ext cx="364320" cy="272880"/>
+            <a:ext cx="363960" cy="272520"/>
           </a:xfrm>
           <a:prstGeom prst="rect">
             <a:avLst/>
@@ -9129,7 +9129,7 @@
         <p:spPr>
           <a:xfrm>
             <a:off x="-2560320" y="-2286000"/>
-            <a:ext cx="5484960" cy="5484960"/>
+            <a:ext cx="5484600" cy="5484600"/>
           </a:xfrm>
           <a:prstGeom prst="ellipse">
             <a:avLst/>
@@ -9172,7 +9172,7 @@
         <p:spPr>
           <a:xfrm>
             <a:off x="777240" y="3017520"/>
-            <a:ext cx="10514160" cy="1004400"/>
+            <a:ext cx="10513800" cy="1004040"/>
           </a:xfrm>
           <a:prstGeom prst="rect">
             <a:avLst/>
@@ -9233,7 +9233,7 @@
         <p:spPr>
           <a:xfrm>
             <a:off x="822960" y="4023360"/>
-            <a:ext cx="9975960" cy="455760"/>
+            <a:ext cx="9975600" cy="455400"/>
           </a:xfrm>
           <a:prstGeom prst="rect">
             <a:avLst/>
@@ -9272,7 +9272,7 @@
                 <a:latin typeface="Calibri"/>
                 <a:ea typeface="Calibri"/>
               </a:rPr>
-              <a:t>The complete, interactive report is available to you - by Alexander_Vasilopoulos - Olist_Presentation_EN(.pbix)</a:t>
+              <a:t>The complete, interactive report is available to you - by Alexander_Vasilopoulos</a:t>
             </a:r>
             <a:endParaRPr lang="en-GB" sz="1400" b="0" u="none" strike="noStrike">
               <a:solidFill>
